--- a/Group Project 2/Analysis of Airport Security With Queuing Theory.pptx
+++ b/Group Project 2/Analysis of Airport Security With Queuing Theory.pptx
@@ -910,8 +910,13 @@
         <a:p>
           <a:r>
             <a:rPr lang="en-US" dirty="0"/>
-            <a:t>Customer Count</a:t>
+            <a:t>Average </a:t>
           </a:r>
+          <a:r>
+            <a:rPr lang="en-US" dirty="0" err="1"/>
+            <a:t>Custcomers</a:t>
+          </a:r>
+          <a:endParaRPr lang="en-US" dirty="0"/>
         </a:p>
       </dgm:t>
     </dgm:pt>
@@ -1000,7 +1005,7 @@
         <a:p>
           <a:r>
             <a:rPr lang="en-US" dirty="0"/>
-            <a:t>Approximating</a:t>
+            <a:t>Minimize L1</a:t>
           </a:r>
         </a:p>
       </dgm:t>
@@ -1180,10 +1185,10 @@
     </dgm:pt>
   </dgm:ptLst>
   <dgm:cxnLst>
+    <dgm:cxn modelId="{DC1AA649-6A0B-4C63-BAAF-0AD8D7396153}" type="presOf" srcId="{71F0AC46-0068-435E-83AA-5798092D61BF}" destId="{9A149E6B-9636-4E2E-BE23-C8B95DB956AA}" srcOrd="0" destOrd="0" presId="urn:microsoft.com/office/officeart/2005/8/layout/chevron2"/>
     <dgm:cxn modelId="{B0D7875D-8F1A-4000-8DCC-3A64676AD7FA}" type="presOf" srcId="{9592DD0A-D121-4320-A6C0-B5B222C7F96E}" destId="{94EA7074-8BE1-47D7-9A83-1880DF48095E}" srcOrd="0" destOrd="0" presId="urn:microsoft.com/office/officeart/2005/8/layout/chevron2"/>
     <dgm:cxn modelId="{8DF43D63-9A26-4385-BBD7-6631C87005D5}" srcId="{71F0AC46-0068-435E-83AA-5798092D61BF}" destId="{9592DD0A-D121-4320-A6C0-B5B222C7F96E}" srcOrd="1" destOrd="0" parTransId="{EDBBA798-C3B0-44F8-AEEA-ADBF82396247}" sibTransId="{6B417541-5CDC-40B6-B5DB-9D7BA14FA674}"/>
     <dgm:cxn modelId="{AC7C4966-2005-4725-9A65-9A614164B003}" type="presOf" srcId="{B13937DB-0245-4D61-820E-3AD7F84BE570}" destId="{FDD7560C-9282-4BDE-95A3-1EA1738E7698}" srcOrd="0" destOrd="0" presId="urn:microsoft.com/office/officeart/2005/8/layout/chevron2"/>
-    <dgm:cxn modelId="{DC1AA649-6A0B-4C63-BAAF-0AD8D7396153}" type="presOf" srcId="{71F0AC46-0068-435E-83AA-5798092D61BF}" destId="{9A149E6B-9636-4E2E-BE23-C8B95DB956AA}" srcOrd="0" destOrd="0" presId="urn:microsoft.com/office/officeart/2005/8/layout/chevron2"/>
     <dgm:cxn modelId="{696A956F-226B-4C2F-A76E-7ED1C1F2D01D}" type="presOf" srcId="{374BF912-AE7C-46CB-AB44-E42827C0529F}" destId="{085E04A4-0AEE-4613-9D78-DD4A3FD57523}" srcOrd="0" destOrd="0" presId="urn:microsoft.com/office/officeart/2005/8/layout/chevron2"/>
     <dgm:cxn modelId="{0EF2A670-0CE5-4802-A3FE-30F86E0122E4}" srcId="{71F0AC46-0068-435E-83AA-5798092D61BF}" destId="{374BF912-AE7C-46CB-AB44-E42827C0529F}" srcOrd="0" destOrd="0" parTransId="{1E176BE9-73E3-422B-94F4-0F5F119B27A4}" sibTransId="{28DCFFC2-2197-4E41-8AB7-590049EA0423}"/>
     <dgm:cxn modelId="{0EE64D8A-EF6D-49D6-BB78-156CA9DC9C96}" type="presOf" srcId="{748037CE-811D-4DCF-8AC9-8D9AA207B5F8}" destId="{8EE6655A-D271-4EB3-B2DC-0626CD57261D}" srcOrd="0" destOrd="0" presId="urn:microsoft.com/office/officeart/2005/8/layout/chevron2"/>
@@ -1396,8 +1401,13 @@
           </a:pPr>
           <a:r>
             <a:rPr lang="en-US" sz="1000" kern="1200" dirty="0"/>
-            <a:t>Customer Count</a:t>
+            <a:t>Average </a:t>
           </a:r>
+          <a:r>
+            <a:rPr lang="en-US" sz="1000" kern="1200" dirty="0" err="1"/>
+            <a:t>Custcomers</a:t>
+          </a:r>
+          <a:endParaRPr lang="en-US" sz="1000" kern="1200" dirty="0"/>
         </a:p>
       </dsp:txBody>
       <dsp:txXfrm rot="-5400000">
@@ -1626,7 +1636,7 @@
           </a:pPr>
           <a:r>
             <a:rPr lang="en-US" sz="1000" kern="1200" dirty="0"/>
-            <a:t>Approximating</a:t>
+            <a:t>Minimize L1</a:t>
           </a:r>
         </a:p>
       </dsp:txBody>
@@ -3059,7 +3069,7 @@
           <a:p>
             <a:fld id="{1177A1E1-1B6D-4C20-AD2F-CB2EA266D983}" type="datetimeFigureOut">
               <a:rPr lang="en-US" smtClean="0"/>
-              <a:t>7/28/2025</a:t>
+              <a:t>7/28/25</a:t>
             </a:fld>
             <a:endParaRPr lang="en-US"/>
           </a:p>
@@ -4716,7 +4726,7 @@
           <a:p>
             <a:fld id="{4843D276-EBCF-45FD-A65E-C5B84C7DA712}" type="datetimeFigureOut">
               <a:rPr lang="en-US" smtClean="0"/>
-              <a:t>7/28/2025</a:t>
+              <a:t>7/28/25</a:t>
             </a:fld>
             <a:endParaRPr lang="en-US"/>
           </a:p>
@@ -4924,7 +4934,7 @@
           <a:p>
             <a:fld id="{4843D276-EBCF-45FD-A65E-C5B84C7DA712}" type="datetimeFigureOut">
               <a:rPr lang="en-US" smtClean="0"/>
-              <a:t>7/28/2025</a:t>
+              <a:t>7/28/25</a:t>
             </a:fld>
             <a:endParaRPr lang="en-US"/>
           </a:p>
@@ -5180,7 +5190,7 @@
           <a:p>
             <a:fld id="{4843D276-EBCF-45FD-A65E-C5B84C7DA712}" type="datetimeFigureOut">
               <a:rPr lang="en-US" smtClean="0"/>
-              <a:t>7/28/2025</a:t>
+              <a:t>7/28/25</a:t>
             </a:fld>
             <a:endParaRPr lang="en-US"/>
           </a:p>
@@ -5354,7 +5364,7 @@
           <a:p>
             <a:fld id="{4843D276-EBCF-45FD-A65E-C5B84C7DA712}" type="datetimeFigureOut">
               <a:rPr lang="en-US" smtClean="0"/>
-              <a:t>7/28/2025</a:t>
+              <a:t>7/28/25</a:t>
             </a:fld>
             <a:endParaRPr lang="en-US"/>
           </a:p>
@@ -5697,7 +5707,7 @@
           <a:p>
             <a:fld id="{4843D276-EBCF-45FD-A65E-C5B84C7DA712}" type="datetimeFigureOut">
               <a:rPr lang="en-US" smtClean="0"/>
-              <a:t>7/28/2025</a:t>
+              <a:t>7/28/25</a:t>
             </a:fld>
             <a:endParaRPr lang="en-US"/>
           </a:p>
@@ -5972,7 +5982,7 @@
           <a:p>
             <a:fld id="{4843D276-EBCF-45FD-A65E-C5B84C7DA712}" type="datetimeFigureOut">
               <a:rPr lang="en-US" smtClean="0"/>
-              <a:t>7/28/2025</a:t>
+              <a:t>7/28/25</a:t>
             </a:fld>
             <a:endParaRPr lang="en-US"/>
           </a:p>
@@ -6351,7 +6361,7 @@
           <a:p>
             <a:fld id="{4843D276-EBCF-45FD-A65E-C5B84C7DA712}" type="datetimeFigureOut">
               <a:rPr lang="en-US" smtClean="0"/>
-              <a:t>7/28/2025</a:t>
+              <a:t>7/28/25</a:t>
             </a:fld>
             <a:endParaRPr lang="en-US"/>
           </a:p>
@@ -6469,7 +6479,7 @@
           <a:p>
             <a:fld id="{4843D276-EBCF-45FD-A65E-C5B84C7DA712}" type="datetimeFigureOut">
               <a:rPr lang="en-US" smtClean="0"/>
-              <a:t>7/28/2025</a:t>
+              <a:t>7/28/25</a:t>
             </a:fld>
             <a:endParaRPr lang="en-US"/>
           </a:p>
@@ -6640,7 +6650,7 @@
           <a:p>
             <a:fld id="{4843D276-EBCF-45FD-A65E-C5B84C7DA712}" type="datetimeFigureOut">
               <a:rPr lang="en-US" smtClean="0"/>
-              <a:t>7/28/2025</a:t>
+              <a:t>7/28/25</a:t>
             </a:fld>
             <a:endParaRPr lang="en-US"/>
           </a:p>
@@ -6994,7 +7004,7 @@
           <a:p>
             <a:fld id="{4843D276-EBCF-45FD-A65E-C5B84C7DA712}" type="datetimeFigureOut">
               <a:rPr lang="en-US" smtClean="0"/>
-              <a:t>7/28/2025</a:t>
+              <a:t>7/28/25</a:t>
             </a:fld>
             <a:endParaRPr lang="en-US"/>
           </a:p>
@@ -7376,7 +7386,7 @@
           <a:p>
             <a:fld id="{4843D276-EBCF-45FD-A65E-C5B84C7DA712}" type="datetimeFigureOut">
               <a:rPr lang="en-US" smtClean="0"/>
-              <a:t>7/28/2025</a:t>
+              <a:t>7/28/25</a:t>
             </a:fld>
             <a:endParaRPr lang="en-US"/>
           </a:p>
@@ -7663,7 +7673,7 @@
           <a:p>
             <a:fld id="{4843D276-EBCF-45FD-A65E-C5B84C7DA712}" type="datetimeFigureOut">
               <a:rPr lang="en-US" smtClean="0"/>
-              <a:t>7/28/2025</a:t>
+              <a:t>7/28/25</a:t>
             </a:fld>
             <a:endParaRPr lang="en-US"/>
           </a:p>
@@ -8514,7 +8524,7 @@
           <a:p>
             <a:r>
               <a:rPr lang="en-US" sz="1600" dirty="0"/>
-              <a:t>Next, we wanted to model the system as two separate queues, representative of an airport security checkpoint.</a:t>
+              <a:t>Next, we model the system as parallel queues, representative of an airport security checkpoint.</a:t>
             </a:r>
           </a:p>
           <a:p>
@@ -8527,7 +8537,7 @@
             <a:pPr lvl="1"/>
             <a:r>
               <a:rPr lang="en-US" sz="1600" dirty="0"/>
-              <a:t>Given the difficulty identifying service rates, we elected to make assumptions on the standard deviations of service rates.</a:t>
+              <a:t>Given the difficulty in identifying service rates, we elected to make assumptions about the standard deviations of service rates.</a:t>
             </a:r>
             <a:endParaRPr lang="en-US" sz="1200" dirty="0"/>
           </a:p>
@@ -8540,7 +8550,7 @@
           <a:p>
             <a:r>
               <a:rPr lang="en-US" sz="1600" dirty="0"/>
-              <a:t>These servers are split, with 1 terminal supporting Precheck, and 3 supporting standard screening.</a:t>
+              <a:t>These servers are split, with 1 terminal supporting Precheck and 3 supporting standard screening.</a:t>
             </a:r>
           </a:p>
           <a:p>
@@ -8560,7 +8570,7 @@
             <a:pPr lvl="1"/>
             <a:r>
               <a:rPr lang="en-US" sz="1600" dirty="0"/>
-              <a:t>If TSA Precheck member goes to 70%, what is the outcome on the wait times?</a:t>
+              <a:t>If the TSA Precheck member goes to 70%, what is the outcome on the wait times?</a:t>
             </a:r>
           </a:p>
         </p:txBody>
@@ -8712,13 +8722,13 @@
           <a:p>
             <a:r>
               <a:rPr lang="en-US" sz="1600" dirty="0"/>
-              <a:t>Assume that 100% participation at $0 dollar cost.</a:t>
+              <a:t>Assume that 100% participation at $0 cost.</a:t>
             </a:r>
           </a:p>
           <a:p>
             <a:r>
               <a:rPr lang="en-US" sz="1600" dirty="0"/>
-              <a:t>This leads to a $1.096 dollar per 1% change in participation.</a:t>
+              <a:t>This leads to a $1.096 per 1% change in participation.</a:t>
             </a:r>
           </a:p>
           <a:p>
@@ -8907,15 +8917,14 @@
           <a:p>
             <a:r>
               <a:rPr lang="en-US" dirty="0"/>
-              <a:t>Parallel Standard M/N/3 and </a:t>
-            </a:r>
-            <a:r>
-              <a:rPr lang="en-US" dirty="0" err="1"/>
-              <a:t>PreCheck</a:t>
-            </a:r>
-            <a:r>
+              <a:t>Parallel M/N/4 Results</a:t>
+            </a:r>
+            <a:br>
               <a:rPr lang="en-US" dirty="0"/>
-              <a:t> M/N/1 Results </a:t>
+            </a:br>
+            <a:r>
+              <a:rPr lang="en-US" sz="3200" dirty="0"/>
+              <a:t>(1 TSA lane, 3 regular lanes) </a:t>
             </a:r>
           </a:p>
         </p:txBody>
@@ -9021,7 +9030,7 @@
             </a:r>
             <a:r>
               <a:rPr lang="en-US" sz="1600" dirty="0"/>
-              <a:t> = 7.866</a:t>
+              <a:t> = 7.866*</a:t>
             </a:r>
           </a:p>
           <a:p>
@@ -9036,7 +9045,7 @@
             </a:r>
             <a:r>
               <a:rPr lang="en-US" sz="1600" dirty="0"/>
-              <a:t> = 1.97</a:t>
+              <a:t> = 1.97*</a:t>
             </a:r>
           </a:p>
           <a:p>
@@ -9051,7 +9060,7 @@
             </a:r>
             <a:r>
               <a:rPr lang="en-US" sz="1600" dirty="0"/>
-              <a:t> = 2.262</a:t>
+              <a:t> = 2.262*</a:t>
             </a:r>
           </a:p>
           <a:p>
@@ -9064,14 +9073,14 @@
             <a:pPr lvl="1"/>
             <a:r>
               <a:rPr lang="en-US" sz="1600" dirty="0"/>
-              <a:t>1. Simulations ranging from $0 to $120, in $10 increments , run 5 simulations per price.</a:t>
+              <a:t>1. Simulations ranging from $0 to $120, in $10 increments, run 5 simulations per price.</a:t>
             </a:r>
           </a:p>
           <a:p>
             <a:pPr lvl="1"/>
             <a:r>
               <a:rPr lang="en-US" sz="1600" dirty="0"/>
-              <a:t>2. Ran simulations ranging from $70 to $90, in $0.25 increments, run 5 simulations per price.</a:t>
+              <a:t>2. Ran simulations ranging from $70 to $90, in $0.25 increments, running 5 simulations per price.</a:t>
             </a:r>
           </a:p>
           <a:p>
@@ -9098,14 +9107,14 @@
             <a:pPr lvl="1"/>
             <a:r>
               <a:rPr lang="en-US" sz="1600" dirty="0"/>
-              <a:t> Run 500 simulations.</a:t>
+              <a:t>Run 500 simulations.</a:t>
             </a:r>
           </a:p>
           <a:p>
             <a:pPr lvl="1"/>
             <a:r>
               <a:rPr lang="en-US" sz="1600" dirty="0"/>
-              <a:t>Gathered average wait time, maximum wait time and passenger throughput.</a:t>
+              <a:t>Gathered average wait time, maximum wait time, and passenger throughput.</a:t>
             </a:r>
           </a:p>
           <a:p>
@@ -9117,12 +9126,294 @@
           </a:p>
         </p:txBody>
       </p:sp>
+      <p:sp>
+        <p:nvSpPr>
+          <p:cNvPr id="4" name="Content Placeholder 5">
+            <a:extLst>
+              <a:ext uri="{FF2B5EF4-FFF2-40B4-BE49-F238E27FC236}">
+                <a16:creationId xmlns:a16="http://schemas.microsoft.com/office/drawing/2014/main" id="{BCD8E700-13AE-667D-D7F9-00A986115BBE}"/>
+              </a:ext>
+            </a:extLst>
+          </p:cNvPr>
+          <p:cNvSpPr txBox="1">
+            <a:spLocks/>
+          </p:cNvSpPr>
+          <p:nvPr/>
+        </p:nvSpPr>
+        <p:spPr>
+          <a:xfrm>
+            <a:off x="9472125" y="6011372"/>
+            <a:ext cx="5183188" cy="470460"/>
+          </a:xfrm>
+          <a:prstGeom prst="rect">
+            <a:avLst/>
+          </a:prstGeom>
+        </p:spPr>
+        <p:txBody>
+          <a:bodyPr>
+            <a:normAutofit/>
+          </a:bodyPr>
+          <a:lstStyle>
+            <a:lvl1pPr marL="91440" indent="-91440" algn="l" defTabSz="914400" rtl="0" eaLnBrk="1" latinLnBrk="0" hangingPunct="1">
+              <a:lnSpc>
+                <a:spcPct val="90000"/>
+              </a:lnSpc>
+              <a:spcBef>
+                <a:spcPts val="1200"/>
+              </a:spcBef>
+              <a:spcAft>
+                <a:spcPts val="200"/>
+              </a:spcAft>
+              <a:buClr>
+                <a:schemeClr val="accent1"/>
+              </a:buClr>
+              <a:buSzPct val="100000"/>
+              <a:buFont typeface="Calibri" panose="020F0502020204030204" pitchFamily="34" charset="0"/>
+              <a:buChar char=" "/>
+              <a:defRPr sz="2000" kern="1200">
+                <a:solidFill>
+                  <a:schemeClr val="tx1">
+                    <a:lumMod val="75000"/>
+                    <a:lumOff val="25000"/>
+                  </a:schemeClr>
+                </a:solidFill>
+                <a:latin typeface="+mn-lt"/>
+                <a:ea typeface="+mn-ea"/>
+                <a:cs typeface="+mn-cs"/>
+              </a:defRPr>
+            </a:lvl1pPr>
+            <a:lvl2pPr marL="384048" indent="-182880" algn="l" defTabSz="914400" rtl="0" eaLnBrk="1" latinLnBrk="0" hangingPunct="1">
+              <a:lnSpc>
+                <a:spcPct val="90000"/>
+              </a:lnSpc>
+              <a:spcBef>
+                <a:spcPts val="200"/>
+              </a:spcBef>
+              <a:spcAft>
+                <a:spcPts val="400"/>
+              </a:spcAft>
+              <a:buClr>
+                <a:schemeClr val="accent1"/>
+              </a:buClr>
+              <a:buFont typeface="Calibri" pitchFamily="34" charset="0"/>
+              <a:buChar char="◦"/>
+              <a:defRPr sz="1800" kern="1200">
+                <a:solidFill>
+                  <a:schemeClr val="tx1">
+                    <a:lumMod val="75000"/>
+                    <a:lumOff val="25000"/>
+                  </a:schemeClr>
+                </a:solidFill>
+                <a:latin typeface="+mn-lt"/>
+                <a:ea typeface="+mn-ea"/>
+                <a:cs typeface="+mn-cs"/>
+              </a:defRPr>
+            </a:lvl2pPr>
+            <a:lvl3pPr marL="566928" indent="-182880" algn="l" defTabSz="914400" rtl="0" eaLnBrk="1" latinLnBrk="0" hangingPunct="1">
+              <a:lnSpc>
+                <a:spcPct val="90000"/>
+              </a:lnSpc>
+              <a:spcBef>
+                <a:spcPts val="200"/>
+              </a:spcBef>
+              <a:spcAft>
+                <a:spcPts val="400"/>
+              </a:spcAft>
+              <a:buClr>
+                <a:schemeClr val="accent1"/>
+              </a:buClr>
+              <a:buFont typeface="Calibri" pitchFamily="34" charset="0"/>
+              <a:buChar char="◦"/>
+              <a:defRPr sz="1400" kern="1200">
+                <a:solidFill>
+                  <a:schemeClr val="tx1">
+                    <a:lumMod val="75000"/>
+                    <a:lumOff val="25000"/>
+                  </a:schemeClr>
+                </a:solidFill>
+                <a:latin typeface="+mn-lt"/>
+                <a:ea typeface="+mn-ea"/>
+                <a:cs typeface="+mn-cs"/>
+              </a:defRPr>
+            </a:lvl3pPr>
+            <a:lvl4pPr marL="749808" indent="-182880" algn="l" defTabSz="914400" rtl="0" eaLnBrk="1" latinLnBrk="0" hangingPunct="1">
+              <a:lnSpc>
+                <a:spcPct val="90000"/>
+              </a:lnSpc>
+              <a:spcBef>
+                <a:spcPts val="200"/>
+              </a:spcBef>
+              <a:spcAft>
+                <a:spcPts val="400"/>
+              </a:spcAft>
+              <a:buClr>
+                <a:schemeClr val="accent1"/>
+              </a:buClr>
+              <a:buFont typeface="Calibri" pitchFamily="34" charset="0"/>
+              <a:buChar char="◦"/>
+              <a:defRPr sz="1400" kern="1200">
+                <a:solidFill>
+                  <a:schemeClr val="tx1">
+                    <a:lumMod val="75000"/>
+                    <a:lumOff val="25000"/>
+                  </a:schemeClr>
+                </a:solidFill>
+                <a:latin typeface="+mn-lt"/>
+                <a:ea typeface="+mn-ea"/>
+                <a:cs typeface="+mn-cs"/>
+              </a:defRPr>
+            </a:lvl4pPr>
+            <a:lvl5pPr marL="932688" indent="-182880" algn="l" defTabSz="914400" rtl="0" eaLnBrk="1" latinLnBrk="0" hangingPunct="1">
+              <a:lnSpc>
+                <a:spcPct val="90000"/>
+              </a:lnSpc>
+              <a:spcBef>
+                <a:spcPts val="200"/>
+              </a:spcBef>
+              <a:spcAft>
+                <a:spcPts val="400"/>
+              </a:spcAft>
+              <a:buClr>
+                <a:schemeClr val="accent1"/>
+              </a:buClr>
+              <a:buFont typeface="Calibri" pitchFamily="34" charset="0"/>
+              <a:buChar char="◦"/>
+              <a:defRPr sz="1400" kern="1200">
+                <a:solidFill>
+                  <a:schemeClr val="tx1">
+                    <a:lumMod val="75000"/>
+                    <a:lumOff val="25000"/>
+                  </a:schemeClr>
+                </a:solidFill>
+                <a:latin typeface="+mn-lt"/>
+                <a:ea typeface="+mn-ea"/>
+                <a:cs typeface="+mn-cs"/>
+              </a:defRPr>
+            </a:lvl5pPr>
+            <a:lvl6pPr marL="1100000" indent="-228600" algn="l" defTabSz="914400" rtl="0" eaLnBrk="1" latinLnBrk="0" hangingPunct="1">
+              <a:lnSpc>
+                <a:spcPct val="90000"/>
+              </a:lnSpc>
+              <a:spcBef>
+                <a:spcPts val="200"/>
+              </a:spcBef>
+              <a:spcAft>
+                <a:spcPts val="400"/>
+              </a:spcAft>
+              <a:buClr>
+                <a:schemeClr val="accent1"/>
+              </a:buClr>
+              <a:buFont typeface="Calibri" pitchFamily="34" charset="0"/>
+              <a:buChar char="◦"/>
+              <a:defRPr sz="1400" kern="1200">
+                <a:solidFill>
+                  <a:schemeClr val="tx1">
+                    <a:lumMod val="75000"/>
+                    <a:lumOff val="25000"/>
+                  </a:schemeClr>
+                </a:solidFill>
+                <a:latin typeface="+mn-lt"/>
+                <a:ea typeface="+mn-ea"/>
+                <a:cs typeface="+mn-cs"/>
+              </a:defRPr>
+            </a:lvl6pPr>
+            <a:lvl7pPr marL="1300000" indent="-228600" algn="l" defTabSz="914400" rtl="0" eaLnBrk="1" latinLnBrk="0" hangingPunct="1">
+              <a:lnSpc>
+                <a:spcPct val="90000"/>
+              </a:lnSpc>
+              <a:spcBef>
+                <a:spcPts val="200"/>
+              </a:spcBef>
+              <a:spcAft>
+                <a:spcPts val="400"/>
+              </a:spcAft>
+              <a:buClr>
+                <a:schemeClr val="accent1"/>
+              </a:buClr>
+              <a:buFont typeface="Calibri" pitchFamily="34" charset="0"/>
+              <a:buChar char="◦"/>
+              <a:defRPr sz="1400" kern="1200">
+                <a:solidFill>
+                  <a:schemeClr val="tx1">
+                    <a:lumMod val="75000"/>
+                    <a:lumOff val="25000"/>
+                  </a:schemeClr>
+                </a:solidFill>
+                <a:latin typeface="+mn-lt"/>
+                <a:ea typeface="+mn-ea"/>
+                <a:cs typeface="+mn-cs"/>
+              </a:defRPr>
+            </a:lvl7pPr>
+            <a:lvl8pPr marL="1500000" indent="-228600" algn="l" defTabSz="914400" rtl="0" eaLnBrk="1" latinLnBrk="0" hangingPunct="1">
+              <a:lnSpc>
+                <a:spcPct val="90000"/>
+              </a:lnSpc>
+              <a:spcBef>
+                <a:spcPts val="200"/>
+              </a:spcBef>
+              <a:spcAft>
+                <a:spcPts val="400"/>
+              </a:spcAft>
+              <a:buClr>
+                <a:schemeClr val="accent1"/>
+              </a:buClr>
+              <a:buFont typeface="Calibri" pitchFamily="34" charset="0"/>
+              <a:buChar char="◦"/>
+              <a:defRPr sz="1400" kern="1200">
+                <a:solidFill>
+                  <a:schemeClr val="tx1">
+                    <a:lumMod val="75000"/>
+                    <a:lumOff val="25000"/>
+                  </a:schemeClr>
+                </a:solidFill>
+                <a:latin typeface="+mn-lt"/>
+                <a:ea typeface="+mn-ea"/>
+                <a:cs typeface="+mn-cs"/>
+              </a:defRPr>
+            </a:lvl8pPr>
+            <a:lvl9pPr marL="1700000" indent="-228600" algn="l" defTabSz="914400" rtl="0" eaLnBrk="1" latinLnBrk="0" hangingPunct="1">
+              <a:lnSpc>
+                <a:spcPct val="90000"/>
+              </a:lnSpc>
+              <a:spcBef>
+                <a:spcPts val="200"/>
+              </a:spcBef>
+              <a:spcAft>
+                <a:spcPts val="400"/>
+              </a:spcAft>
+              <a:buClr>
+                <a:schemeClr val="accent1"/>
+              </a:buClr>
+              <a:buFont typeface="Calibri" pitchFamily="34" charset="0"/>
+              <a:buChar char="◦"/>
+              <a:defRPr sz="1400" kern="1200">
+                <a:solidFill>
+                  <a:schemeClr val="tx1">
+                    <a:lumMod val="75000"/>
+                    <a:lumOff val="25000"/>
+                  </a:schemeClr>
+                </a:solidFill>
+                <a:latin typeface="+mn-lt"/>
+                <a:ea typeface="+mn-ea"/>
+                <a:cs typeface="+mn-cs"/>
+              </a:defRPr>
+            </a:lvl9pPr>
+          </a:lstStyle>
+          <a:p>
+            <a:pPr lvl="1"/>
+            <a:r>
+              <a:rPr lang="en-US" sz="1200" dirty="0"/>
+              <a:t>*rates are in passengers/minute</a:t>
+            </a:r>
+          </a:p>
+        </p:txBody>
+      </p:sp>
       <p:pic>
         <p:nvPicPr>
-          <p:cNvPr id="5" name="Picture 4">
+          <p:cNvPr id="6" name="Picture 5" descr="A table with numbers and a few lines&#10;&#10;AI-generated content may be incorrect.">
             <a:extLst>
               <a:ext uri="{FF2B5EF4-FFF2-40B4-BE49-F238E27FC236}">
-                <a16:creationId xmlns:a16="http://schemas.microsoft.com/office/drawing/2014/main" id="{95B6E26F-E66E-09E9-8213-EFF9F1440F61}"/>
+                <a16:creationId xmlns:a16="http://schemas.microsoft.com/office/drawing/2014/main" id="{086DE3F5-AC98-0F79-464B-AB432CEB510D}"/>
               </a:ext>
             </a:extLst>
           </p:cNvPr>
@@ -9132,15 +9423,21 @@
           <p:nvPr/>
         </p:nvPicPr>
         <p:blipFill>
-          <a:blip r:embed="rId5"/>
+          <a:blip r:embed="rId5">
+            <a:extLst>
+              <a:ext uri="{28A0092B-C50C-407E-A947-70E740481C1C}">
+                <a14:useLocalDpi xmlns:a14="http://schemas.microsoft.com/office/drawing/2010/main" val="0"/>
+              </a:ext>
+            </a:extLst>
+          </a:blip>
           <a:stretch>
             <a:fillRect/>
           </a:stretch>
         </p:blipFill>
         <p:spPr>
           <a:xfrm>
-            <a:off x="6729909" y="4634346"/>
-            <a:ext cx="3799214" cy="892652"/>
+            <a:off x="6345301" y="4539785"/>
+            <a:ext cx="3866915" cy="1340020"/>
           </a:xfrm>
           <a:prstGeom prst="rect">
             <a:avLst/>
@@ -9206,7 +9503,14 @@
           <a:p>
             <a:r>
               <a:rPr lang="en-US" dirty="0"/>
-              <a:t>Parallel M/N/2 Results </a:t>
+              <a:t>Parallel M/N/4 Results </a:t>
+            </a:r>
+            <a:br>
+              <a:rPr lang="en-US" dirty="0"/>
+            </a:br>
+            <a:r>
+              <a:rPr lang="en-US" sz="3200" dirty="0"/>
+              <a:t>(1 TSA lane, 3 regular lanes)</a:t>
             </a:r>
           </a:p>
         </p:txBody>
@@ -9252,7 +9556,7 @@
             </a:r>
             <a:r>
               <a:rPr lang="en-US" sz="1600" dirty="0"/>
-              <a:t> = 7.866</a:t>
+              <a:t> = 7.866*</a:t>
             </a:r>
           </a:p>
           <a:p>
@@ -9267,7 +9571,7 @@
             </a:r>
             <a:r>
               <a:rPr lang="en-US" sz="1600" dirty="0"/>
-              <a:t> = 1.97</a:t>
+              <a:t> = 1.97*</a:t>
             </a:r>
           </a:p>
           <a:p>
@@ -9282,7 +9586,7 @@
             </a:r>
             <a:r>
               <a:rPr lang="en-US" sz="1600" dirty="0"/>
-              <a:t> = 2.262</a:t>
+              <a:t> = 2.262*</a:t>
             </a:r>
           </a:p>
           <a:p>
@@ -9373,10 +9677,10 @@
       </p:pic>
       <p:pic>
         <p:nvPicPr>
-          <p:cNvPr id="10" name="Picture 9">
+          <p:cNvPr id="12" name="Picture 11">
             <a:extLst>
               <a:ext uri="{FF2B5EF4-FFF2-40B4-BE49-F238E27FC236}">
-                <a16:creationId xmlns:a16="http://schemas.microsoft.com/office/drawing/2014/main" id="{C67F9F74-AFD0-6743-6C7E-925A6D94ECF8}"/>
+                <a16:creationId xmlns:a16="http://schemas.microsoft.com/office/drawing/2014/main" id="{371BB8A0-3CF4-4174-D138-EB3E5EF9EE19}"/>
               </a:ext>
             </a:extLst>
           </p:cNvPr>
@@ -9393,20 +9697,302 @@
         </p:blipFill>
         <p:spPr>
           <a:xfrm>
-            <a:off x="6488242" y="4823120"/>
-            <a:ext cx="3902631" cy="1295434"/>
+            <a:off x="8278759" y="1870175"/>
+            <a:ext cx="3519066" cy="2404976"/>
           </a:xfrm>
           <a:prstGeom prst="rect">
             <a:avLst/>
           </a:prstGeom>
         </p:spPr>
       </p:pic>
+      <p:sp>
+        <p:nvSpPr>
+          <p:cNvPr id="7" name="Content Placeholder 5">
+            <a:extLst>
+              <a:ext uri="{FF2B5EF4-FFF2-40B4-BE49-F238E27FC236}">
+                <a16:creationId xmlns:a16="http://schemas.microsoft.com/office/drawing/2014/main" id="{5361FAFE-3775-BF89-1C15-B32343BF802A}"/>
+              </a:ext>
+            </a:extLst>
+          </p:cNvPr>
+          <p:cNvSpPr txBox="1">
+            <a:spLocks/>
+          </p:cNvSpPr>
+          <p:nvPr/>
+        </p:nvSpPr>
+        <p:spPr>
+          <a:xfrm>
+            <a:off x="9599721" y="6053904"/>
+            <a:ext cx="5183188" cy="470460"/>
+          </a:xfrm>
+          <a:prstGeom prst="rect">
+            <a:avLst/>
+          </a:prstGeom>
+        </p:spPr>
+        <p:txBody>
+          <a:bodyPr>
+            <a:normAutofit/>
+          </a:bodyPr>
+          <a:lstStyle>
+            <a:lvl1pPr marL="91440" indent="-91440" algn="l" defTabSz="914400" rtl="0" eaLnBrk="1" latinLnBrk="0" hangingPunct="1">
+              <a:lnSpc>
+                <a:spcPct val="90000"/>
+              </a:lnSpc>
+              <a:spcBef>
+                <a:spcPts val="1200"/>
+              </a:spcBef>
+              <a:spcAft>
+                <a:spcPts val="200"/>
+              </a:spcAft>
+              <a:buClr>
+                <a:schemeClr val="accent1"/>
+              </a:buClr>
+              <a:buSzPct val="100000"/>
+              <a:buFont typeface="Calibri" panose="020F0502020204030204" pitchFamily="34" charset="0"/>
+              <a:buChar char=" "/>
+              <a:defRPr sz="2000" kern="1200">
+                <a:solidFill>
+                  <a:schemeClr val="tx1">
+                    <a:lumMod val="75000"/>
+                    <a:lumOff val="25000"/>
+                  </a:schemeClr>
+                </a:solidFill>
+                <a:latin typeface="+mn-lt"/>
+                <a:ea typeface="+mn-ea"/>
+                <a:cs typeface="+mn-cs"/>
+              </a:defRPr>
+            </a:lvl1pPr>
+            <a:lvl2pPr marL="384048" indent="-182880" algn="l" defTabSz="914400" rtl="0" eaLnBrk="1" latinLnBrk="0" hangingPunct="1">
+              <a:lnSpc>
+                <a:spcPct val="90000"/>
+              </a:lnSpc>
+              <a:spcBef>
+                <a:spcPts val="200"/>
+              </a:spcBef>
+              <a:spcAft>
+                <a:spcPts val="400"/>
+              </a:spcAft>
+              <a:buClr>
+                <a:schemeClr val="accent1"/>
+              </a:buClr>
+              <a:buFont typeface="Calibri" pitchFamily="34" charset="0"/>
+              <a:buChar char="◦"/>
+              <a:defRPr sz="1800" kern="1200">
+                <a:solidFill>
+                  <a:schemeClr val="tx1">
+                    <a:lumMod val="75000"/>
+                    <a:lumOff val="25000"/>
+                  </a:schemeClr>
+                </a:solidFill>
+                <a:latin typeface="+mn-lt"/>
+                <a:ea typeface="+mn-ea"/>
+                <a:cs typeface="+mn-cs"/>
+              </a:defRPr>
+            </a:lvl2pPr>
+            <a:lvl3pPr marL="566928" indent="-182880" algn="l" defTabSz="914400" rtl="0" eaLnBrk="1" latinLnBrk="0" hangingPunct="1">
+              <a:lnSpc>
+                <a:spcPct val="90000"/>
+              </a:lnSpc>
+              <a:spcBef>
+                <a:spcPts val="200"/>
+              </a:spcBef>
+              <a:spcAft>
+                <a:spcPts val="400"/>
+              </a:spcAft>
+              <a:buClr>
+                <a:schemeClr val="accent1"/>
+              </a:buClr>
+              <a:buFont typeface="Calibri" pitchFamily="34" charset="0"/>
+              <a:buChar char="◦"/>
+              <a:defRPr sz="1400" kern="1200">
+                <a:solidFill>
+                  <a:schemeClr val="tx1">
+                    <a:lumMod val="75000"/>
+                    <a:lumOff val="25000"/>
+                  </a:schemeClr>
+                </a:solidFill>
+                <a:latin typeface="+mn-lt"/>
+                <a:ea typeface="+mn-ea"/>
+                <a:cs typeface="+mn-cs"/>
+              </a:defRPr>
+            </a:lvl3pPr>
+            <a:lvl4pPr marL="749808" indent="-182880" algn="l" defTabSz="914400" rtl="0" eaLnBrk="1" latinLnBrk="0" hangingPunct="1">
+              <a:lnSpc>
+                <a:spcPct val="90000"/>
+              </a:lnSpc>
+              <a:spcBef>
+                <a:spcPts val="200"/>
+              </a:spcBef>
+              <a:spcAft>
+                <a:spcPts val="400"/>
+              </a:spcAft>
+              <a:buClr>
+                <a:schemeClr val="accent1"/>
+              </a:buClr>
+              <a:buFont typeface="Calibri" pitchFamily="34" charset="0"/>
+              <a:buChar char="◦"/>
+              <a:defRPr sz="1400" kern="1200">
+                <a:solidFill>
+                  <a:schemeClr val="tx1">
+                    <a:lumMod val="75000"/>
+                    <a:lumOff val="25000"/>
+                  </a:schemeClr>
+                </a:solidFill>
+                <a:latin typeface="+mn-lt"/>
+                <a:ea typeface="+mn-ea"/>
+                <a:cs typeface="+mn-cs"/>
+              </a:defRPr>
+            </a:lvl4pPr>
+            <a:lvl5pPr marL="932688" indent="-182880" algn="l" defTabSz="914400" rtl="0" eaLnBrk="1" latinLnBrk="0" hangingPunct="1">
+              <a:lnSpc>
+                <a:spcPct val="90000"/>
+              </a:lnSpc>
+              <a:spcBef>
+                <a:spcPts val="200"/>
+              </a:spcBef>
+              <a:spcAft>
+                <a:spcPts val="400"/>
+              </a:spcAft>
+              <a:buClr>
+                <a:schemeClr val="accent1"/>
+              </a:buClr>
+              <a:buFont typeface="Calibri" pitchFamily="34" charset="0"/>
+              <a:buChar char="◦"/>
+              <a:defRPr sz="1400" kern="1200">
+                <a:solidFill>
+                  <a:schemeClr val="tx1">
+                    <a:lumMod val="75000"/>
+                    <a:lumOff val="25000"/>
+                  </a:schemeClr>
+                </a:solidFill>
+                <a:latin typeface="+mn-lt"/>
+                <a:ea typeface="+mn-ea"/>
+                <a:cs typeface="+mn-cs"/>
+              </a:defRPr>
+            </a:lvl5pPr>
+            <a:lvl6pPr marL="1100000" indent="-228600" algn="l" defTabSz="914400" rtl="0" eaLnBrk="1" latinLnBrk="0" hangingPunct="1">
+              <a:lnSpc>
+                <a:spcPct val="90000"/>
+              </a:lnSpc>
+              <a:spcBef>
+                <a:spcPts val="200"/>
+              </a:spcBef>
+              <a:spcAft>
+                <a:spcPts val="400"/>
+              </a:spcAft>
+              <a:buClr>
+                <a:schemeClr val="accent1"/>
+              </a:buClr>
+              <a:buFont typeface="Calibri" pitchFamily="34" charset="0"/>
+              <a:buChar char="◦"/>
+              <a:defRPr sz="1400" kern="1200">
+                <a:solidFill>
+                  <a:schemeClr val="tx1">
+                    <a:lumMod val="75000"/>
+                    <a:lumOff val="25000"/>
+                  </a:schemeClr>
+                </a:solidFill>
+                <a:latin typeface="+mn-lt"/>
+                <a:ea typeface="+mn-ea"/>
+                <a:cs typeface="+mn-cs"/>
+              </a:defRPr>
+            </a:lvl6pPr>
+            <a:lvl7pPr marL="1300000" indent="-228600" algn="l" defTabSz="914400" rtl="0" eaLnBrk="1" latinLnBrk="0" hangingPunct="1">
+              <a:lnSpc>
+                <a:spcPct val="90000"/>
+              </a:lnSpc>
+              <a:spcBef>
+                <a:spcPts val="200"/>
+              </a:spcBef>
+              <a:spcAft>
+                <a:spcPts val="400"/>
+              </a:spcAft>
+              <a:buClr>
+                <a:schemeClr val="accent1"/>
+              </a:buClr>
+              <a:buFont typeface="Calibri" pitchFamily="34" charset="0"/>
+              <a:buChar char="◦"/>
+              <a:defRPr sz="1400" kern="1200">
+                <a:solidFill>
+                  <a:schemeClr val="tx1">
+                    <a:lumMod val="75000"/>
+                    <a:lumOff val="25000"/>
+                  </a:schemeClr>
+                </a:solidFill>
+                <a:latin typeface="+mn-lt"/>
+                <a:ea typeface="+mn-ea"/>
+                <a:cs typeface="+mn-cs"/>
+              </a:defRPr>
+            </a:lvl7pPr>
+            <a:lvl8pPr marL="1500000" indent="-228600" algn="l" defTabSz="914400" rtl="0" eaLnBrk="1" latinLnBrk="0" hangingPunct="1">
+              <a:lnSpc>
+                <a:spcPct val="90000"/>
+              </a:lnSpc>
+              <a:spcBef>
+                <a:spcPts val="200"/>
+              </a:spcBef>
+              <a:spcAft>
+                <a:spcPts val="400"/>
+              </a:spcAft>
+              <a:buClr>
+                <a:schemeClr val="accent1"/>
+              </a:buClr>
+              <a:buFont typeface="Calibri" pitchFamily="34" charset="0"/>
+              <a:buChar char="◦"/>
+              <a:defRPr sz="1400" kern="1200">
+                <a:solidFill>
+                  <a:schemeClr val="tx1">
+                    <a:lumMod val="75000"/>
+                    <a:lumOff val="25000"/>
+                  </a:schemeClr>
+                </a:solidFill>
+                <a:latin typeface="+mn-lt"/>
+                <a:ea typeface="+mn-ea"/>
+                <a:cs typeface="+mn-cs"/>
+              </a:defRPr>
+            </a:lvl8pPr>
+            <a:lvl9pPr marL="1700000" indent="-228600" algn="l" defTabSz="914400" rtl="0" eaLnBrk="1" latinLnBrk="0" hangingPunct="1">
+              <a:lnSpc>
+                <a:spcPct val="90000"/>
+              </a:lnSpc>
+              <a:spcBef>
+                <a:spcPts val="200"/>
+              </a:spcBef>
+              <a:spcAft>
+                <a:spcPts val="400"/>
+              </a:spcAft>
+              <a:buClr>
+                <a:schemeClr val="accent1"/>
+              </a:buClr>
+              <a:buFont typeface="Calibri" pitchFamily="34" charset="0"/>
+              <a:buChar char="◦"/>
+              <a:defRPr sz="1400" kern="1200">
+                <a:solidFill>
+                  <a:schemeClr val="tx1">
+                    <a:lumMod val="75000"/>
+                    <a:lumOff val="25000"/>
+                  </a:schemeClr>
+                </a:solidFill>
+                <a:latin typeface="+mn-lt"/>
+                <a:ea typeface="+mn-ea"/>
+                <a:cs typeface="+mn-cs"/>
+              </a:defRPr>
+            </a:lvl9pPr>
+          </a:lstStyle>
+          <a:p>
+            <a:pPr lvl="1"/>
+            <a:r>
+              <a:rPr lang="en-US" sz="1200" dirty="0"/>
+              <a:t>*rates are in passengers/minute</a:t>
+            </a:r>
+          </a:p>
+        </p:txBody>
+      </p:sp>
       <p:pic>
         <p:nvPicPr>
-          <p:cNvPr id="12" name="Picture 11">
+          <p:cNvPr id="9" name="Picture 8" descr="A table with numbers and a few lines&#10;&#10;AI-generated content may be incorrect.">
             <a:extLst>
               <a:ext uri="{FF2B5EF4-FFF2-40B4-BE49-F238E27FC236}">
-                <a16:creationId xmlns:a16="http://schemas.microsoft.com/office/drawing/2014/main" id="{371BB8A0-3CF4-4174-D138-EB3E5EF9EE19}"/>
+                <a16:creationId xmlns:a16="http://schemas.microsoft.com/office/drawing/2014/main" id="{901948C7-F4F7-7235-BC03-EAEAD0AA9144}"/>
               </a:ext>
             </a:extLst>
           </p:cNvPr>
@@ -9416,15 +10002,21 @@
           <p:nvPr/>
         </p:nvPicPr>
         <p:blipFill>
-          <a:blip r:embed="rId5"/>
+          <a:blip r:embed="rId5">
+            <a:extLst>
+              <a:ext uri="{28A0092B-C50C-407E-A947-70E740481C1C}">
+                <a14:useLocalDpi xmlns:a14="http://schemas.microsoft.com/office/drawing/2010/main" val="0"/>
+              </a:ext>
+            </a:extLst>
+          </a:blip>
           <a:stretch>
             <a:fillRect/>
           </a:stretch>
         </p:blipFill>
         <p:spPr>
           <a:xfrm>
-            <a:off x="8278759" y="1870175"/>
-            <a:ext cx="3519066" cy="2404976"/>
+            <a:off x="6345301" y="4539785"/>
+            <a:ext cx="3866915" cy="1340020"/>
           </a:xfrm>
           <a:prstGeom prst="rect">
             <a:avLst/>
@@ -9657,7 +10249,7 @@
             </a:pPr>
             <a:r>
               <a:rPr lang="en-US" dirty="0"/>
-              <a:t>Built a priority Que M/M/C Model.</a:t>
+              <a:t>Built a priority queue M/M/C Model.</a:t>
             </a:r>
           </a:p>
           <a:p>
@@ -9667,7 +10259,7 @@
             </a:pPr>
             <a:r>
               <a:rPr lang="en-US" dirty="0"/>
-              <a:t>Identified coefficient values from research and inference.</a:t>
+              <a:t>Identified parameter values from research and inference.</a:t>
             </a:r>
           </a:p>
           <a:p>
@@ -9677,7 +10269,7 @@
             </a:pPr>
             <a:r>
               <a:rPr lang="en-US" dirty="0"/>
-              <a:t>Optimized the M/M/C model against total cost.</a:t>
+              <a:t>Optimized total cost under M/M/c priority queue design.</a:t>
             </a:r>
           </a:p>
           <a:p>
@@ -9687,7 +10279,7 @@
             </a:pPr>
             <a:r>
               <a:rPr lang="en-US" dirty="0"/>
-              <a:t>Modified M/M/C to a M/N/C model to simulate a single checkpoint.</a:t>
+              <a:t>Modified M/M/C to an M/N/C parallel model to simulate a single checkpoint.</a:t>
             </a:r>
           </a:p>
           <a:p>
@@ -9707,7 +10299,7 @@
             </a:pPr>
             <a:r>
               <a:rPr lang="en-US" dirty="0"/>
-              <a:t>Examined the sensitivity of our models</a:t>
+              <a:t>Examined the sensitivity of our results to parameters</a:t>
             </a:r>
           </a:p>
         </p:txBody>
@@ -10235,21 +10827,21 @@
             <a:pPr lvl="1"/>
             <a:r>
               <a:rPr lang="en-US" dirty="0"/>
-              <a:t>M/M/c</a:t>
+              <a:t>M/M/c priority queue</a:t>
             </a:r>
           </a:p>
           <a:p>
             <a:pPr lvl="1"/>
             <a:r>
               <a:rPr lang="en-US" dirty="0"/>
-              <a:t>Finding Coefficients</a:t>
+              <a:t>Finding Parameters</a:t>
             </a:r>
           </a:p>
           <a:p>
             <a:pPr lvl="1"/>
             <a:r>
               <a:rPr lang="en-US" dirty="0"/>
-              <a:t>M/G/c</a:t>
+              <a:t>M/N/c</a:t>
             </a:r>
           </a:p>
           <a:p>
@@ -10401,16 +10993,9 @@
             </a:r>
           </a:p>
           <a:p>
-            <a:pPr lvl="1"/>
             <a:r>
               <a:rPr lang="en-US" sz="1600" dirty="0"/>
-              <a:t>But this does not account for different screening processes.</a:t>
-            </a:r>
-          </a:p>
-          <a:p>
-            <a:r>
-              <a:rPr lang="en-US" sz="1600" dirty="0"/>
-              <a:t>How do we model security to include a priority queue?</a:t>
+              <a:t>How do we model security with a priority queue?</a:t>
             </a:r>
           </a:p>
           <a:p>
@@ -10670,59 +11255,74 @@
         </p:nvSpPr>
         <p:spPr>
           <a:xfrm>
-            <a:off x="4223982" y="3752850"/>
-            <a:ext cx="7485413" cy="2452687"/>
+            <a:off x="3933469" y="3752849"/>
+            <a:ext cx="7777518" cy="2452687"/>
           </a:xfrm>
         </p:spPr>
         <p:txBody>
           <a:bodyPr anchor="ctr">
-            <a:normAutofit lnSpcReduction="10000"/>
+            <a:normAutofit/>
           </a:bodyPr>
           <a:lstStyle/>
           <a:p>
             <a:r>
               <a:rPr lang="en-US" sz="1500" dirty="0"/>
-              <a:t>Use an M/M/c model [10].</a:t>
-            </a:r>
-          </a:p>
-          <a:p>
+              <a:t>Regular M/M/c has a known closed-form solution, which makes it useful for modeling.</a:t>
+            </a:r>
+          </a:p>
+          <a:p>
+            <a:pPr lvl="1"/>
             <a:r>
               <a:rPr lang="en-US" sz="1500" dirty="0"/>
-              <a:t>Both arrival times and service times are calculated with a Poisson distribution.</a:t>
-            </a:r>
-          </a:p>
-          <a:p>
+              <a:t>The models we use will not have closed-form solutions, so we will use Monte Carlo simulations to identify long-term solutions.</a:t>
+            </a:r>
+          </a:p>
+          <a:p>
+            <a:pPr lvl="1"/>
             <a:r>
               <a:rPr lang="en-US" sz="1500" dirty="0"/>
-              <a:t>This has a known closed form solution, which makes it useful for modeling.</a:t>
-            </a:r>
-          </a:p>
-          <a:p>
-            <a:pPr lvl="1"/>
+              <a:t>Accommodates passenger types with parallel queues.</a:t>
+            </a:r>
+          </a:p>
+          <a:p>
             <a:r>
               <a:rPr lang="en-US" sz="1500" dirty="0"/>
-              <a:t>The models we use construct will not have close form solutions, so we will use Monte Carlo Simulation’s to identify long term solutions.</a:t>
-            </a:r>
-          </a:p>
-          <a:p>
+              <a:t>Approach 1</a:t>
+            </a:r>
+          </a:p>
+          <a:p>
+            <a:pPr lvl="1">
+              <a:buFont typeface="Courier New" panose="02070309020205020404" pitchFamily="49" charset="0"/>
+              <a:buChar char="o"/>
+            </a:pPr>
             <a:r>
               <a:rPr lang="en-US" sz="1500" dirty="0"/>
-              <a:t>But this is not representative.</a:t>
-            </a:r>
-          </a:p>
-          <a:p>
-            <a:pPr lvl="1"/>
+              <a:t>Use an M/M/c model with a priority queue.</a:t>
+            </a:r>
+          </a:p>
+          <a:p>
+            <a:pPr lvl="1">
+              <a:buFont typeface="Courier New" panose="02070309020205020404" pitchFamily="49" charset="0"/>
+              <a:buChar char="o"/>
+            </a:pPr>
             <a:r>
               <a:rPr lang="en-US" sz="1500" dirty="0"/>
-              <a:t>There are different screening processes.</a:t>
-            </a:r>
-          </a:p>
-          <a:p>
-            <a:pPr lvl="1"/>
+              <a:t>Both interarrival times and service times are exponentially distributed, with </a:t>
+            </a:r>
+            <a:r>
+              <a:rPr lang="en-US" sz="1500" dirty="0" err="1"/>
+              <a:t>PreCheck</a:t>
+            </a:r>
             <a:r>
               <a:rPr lang="en-US" sz="1500" dirty="0"/>
-              <a:t>Is a Poisson distribution the best method to model service times? </a:t>
-            </a:r>
+              <a:t> taking priority.</a:t>
+            </a:r>
+          </a:p>
+          <a:p>
+            <a:pPr marL="201168" lvl="1" indent="0">
+              <a:buNone/>
+            </a:pPr>
+            <a:endParaRPr lang="en-US" sz="1500" dirty="0"/>
           </a:p>
         </p:txBody>
       </p:sp>
@@ -10963,7 +11563,7 @@
           <a:p>
             <a:r>
               <a:rPr lang="en-US" dirty="0"/>
-              <a:t>Finding Coefficients</a:t>
+              <a:t>Finding Parameters</a:t>
             </a:r>
           </a:p>
         </p:txBody>
@@ -11032,7 +11632,7 @@
             <a:pPr lvl="1"/>
             <a:r>
               <a:rPr lang="en-US" dirty="0"/>
-              <a:t>Poisson distribution</a:t>
+              <a:t>Exponential distribution</a:t>
             </a:r>
           </a:p>
           <a:p>
@@ -11127,32 +11727,27 @@
             <a:pPr lvl="1"/>
             <a:r>
               <a:rPr lang="en-US" dirty="0"/>
-              <a:t>Poisson distribution</a:t>
+              <a:t>Exponential distribution</a:t>
             </a:r>
           </a:p>
           <a:p>
             <a:pPr lvl="1"/>
             <a:r>
               <a:rPr lang="en-US" dirty="0"/>
-              <a:t>Service Rate: μ</a:t>
-            </a:r>
+              <a:t>Service Rate: </a:t>
+            </a:r>
+            <a:r>
+              <a:rPr lang="en-US" dirty="0" err="1"/>
+              <a:t>μ</a:t>
+            </a:r>
+            <a:endParaRPr lang="en-US" dirty="0"/>
           </a:p>
           <a:p>
             <a:pPr lvl="1"/>
             <a:r>
               <a:rPr lang="en-US" dirty="0"/>
-              <a:t>Not a reported metric.</a:t>
-            </a:r>
-          </a:p>
-          <a:p>
-            <a:pPr lvl="1"/>
-            <a:r>
-              <a:rPr lang="en-US" dirty="0"/>
-              <a:t>What do we do?</a:t>
-            </a:r>
-          </a:p>
-          <a:p>
-            <a:endParaRPr lang="en-US" sz="2200" dirty="0"/>
+              <a:t>Optimizer with Erlang’s C </a:t>
+            </a:r>
           </a:p>
         </p:txBody>
       </p:sp>
@@ -11926,7 +12521,7 @@
                   </a:schemeClr>
                 </a:solidFill>
               </a:rPr>
-              <a:t>Erlang C: he probability that an arriving customer is forced to join the queue</a:t>
+              <a:t>Erlang C: the probability an arriving customer is forced to join the queue</a:t>
             </a:r>
           </a:p>
           <a:p>
@@ -11943,7 +12538,7 @@
                   </a:schemeClr>
                 </a:solidFill>
               </a:rPr>
-              <a:t>Little’s Law: average number in the system is equal to the product of the arrival rate and the average system time. [11]</a:t>
+              <a:t>Little’s Law: the average number in the system is equal to the product of the arrival rate and the average system time. [11]</a:t>
             </a:r>
           </a:p>
           <a:p>
@@ -12123,7 +12718,7 @@
             <p:nvPr>
               <p:extLst>
                 <p:ext uri="{D42A27DB-BD31-4B8C-83A1-F6EECF244321}">
-                  <p14:modId xmlns:p14="http://schemas.microsoft.com/office/powerpoint/2010/main" val="2127608256"/>
+                  <p14:modId xmlns:p14="http://schemas.microsoft.com/office/powerpoint/2010/main" val="632240395"/>
                 </p:ext>
               </p:extLst>
             </p:nvPr>
@@ -12749,7 +13344,7 @@
           <a:p>
             <a:r>
               <a:rPr lang="en-US" dirty="0"/>
-              <a:t>Updated M/M/C Model</a:t>
+              <a:t>M/M/C Priority Queue Model</a:t>
             </a:r>
           </a:p>
         </p:txBody>
@@ -12773,7 +13368,7 @@
         <p:spPr>
           <a:xfrm>
             <a:off x="128282" y="1825625"/>
-            <a:ext cx="4258559" cy="3059737"/>
+            <a:ext cx="4321279" cy="3148002"/>
           </a:xfrm>
         </p:spPr>
         <p:txBody>
@@ -12799,7 +13394,7 @@
             </a:r>
             <a:r>
               <a:rPr lang="en-US" sz="1600" dirty="0"/>
-              <a:t> = 23.6</a:t>
+              <a:t> = 23.6*</a:t>
             </a:r>
           </a:p>
           <a:p>
@@ -12818,7 +13413,7 @@
             </a:r>
             <a:r>
               <a:rPr lang="en-US" sz="1600" dirty="0"/>
-              <a:t> = 1.97</a:t>
+              <a:t> = 1.97*</a:t>
             </a:r>
           </a:p>
           <a:p>
@@ -12837,7 +13432,7 @@
             </a:r>
             <a:r>
               <a:rPr lang="en-US" sz="1600" dirty="0"/>
-              <a:t> = 2.262</a:t>
+              <a:t> = 2.262*</a:t>
             </a:r>
           </a:p>
           <a:p>
@@ -12880,14 +13475,14 @@
             <a:pPr lvl="1"/>
             <a:r>
               <a:rPr lang="en-US" sz="1600" dirty="0"/>
-              <a:t> Run 500 simulations.</a:t>
+              <a:t>Run 500 simulations.</a:t>
             </a:r>
           </a:p>
           <a:p>
             <a:pPr lvl="1"/>
             <a:r>
               <a:rPr lang="en-US" sz="1600" dirty="0"/>
-              <a:t>Average over each to collect average wait time, maximum wait time and passenger throughput.</a:t>
+              <a:t>Average over all to collect average wait time, maximum wait time, and passenger throughput.</a:t>
             </a:r>
           </a:p>
           <a:p>
@@ -12957,7 +13552,7 @@
         </p:blipFill>
         <p:spPr>
           <a:xfrm>
-            <a:off x="4046559" y="2469415"/>
+            <a:off x="4195421" y="2403030"/>
             <a:ext cx="3643647" cy="2717611"/>
           </a:xfrm>
           <a:prstGeom prst="rect">
@@ -12993,7 +13588,7 @@
         </p:blipFill>
         <p:spPr>
           <a:xfrm>
-            <a:off x="7690206" y="2469415"/>
+            <a:off x="7775270" y="2394984"/>
             <a:ext cx="4321279" cy="2791038"/>
           </a:xfrm>
           <a:prstGeom prst="rect">
@@ -13001,6 +13596,288 @@
           </a:prstGeom>
         </p:spPr>
       </p:pic>
+      <p:sp>
+        <p:nvSpPr>
+          <p:cNvPr id="3" name="Content Placeholder 5">
+            <a:extLst>
+              <a:ext uri="{FF2B5EF4-FFF2-40B4-BE49-F238E27FC236}">
+                <a16:creationId xmlns:a16="http://schemas.microsoft.com/office/drawing/2014/main" id="{883A5D34-A66D-335B-17DA-F98AF0B7A72A}"/>
+              </a:ext>
+            </a:extLst>
+          </p:cNvPr>
+          <p:cNvSpPr txBox="1">
+            <a:spLocks/>
+          </p:cNvSpPr>
+          <p:nvPr/>
+        </p:nvSpPr>
+        <p:spPr>
+          <a:xfrm>
+            <a:off x="9472125" y="6011372"/>
+            <a:ext cx="5183188" cy="470460"/>
+          </a:xfrm>
+          <a:prstGeom prst="rect">
+            <a:avLst/>
+          </a:prstGeom>
+        </p:spPr>
+        <p:txBody>
+          <a:bodyPr>
+            <a:normAutofit/>
+          </a:bodyPr>
+          <a:lstStyle>
+            <a:lvl1pPr marL="91440" indent="-91440" algn="l" defTabSz="914400" rtl="0" eaLnBrk="1" latinLnBrk="0" hangingPunct="1">
+              <a:lnSpc>
+                <a:spcPct val="90000"/>
+              </a:lnSpc>
+              <a:spcBef>
+                <a:spcPts val="1200"/>
+              </a:spcBef>
+              <a:spcAft>
+                <a:spcPts val="200"/>
+              </a:spcAft>
+              <a:buClr>
+                <a:schemeClr val="accent1"/>
+              </a:buClr>
+              <a:buSzPct val="100000"/>
+              <a:buFont typeface="Calibri" panose="020F0502020204030204" pitchFamily="34" charset="0"/>
+              <a:buChar char=" "/>
+              <a:defRPr sz="2000" kern="1200">
+                <a:solidFill>
+                  <a:schemeClr val="tx1">
+                    <a:lumMod val="75000"/>
+                    <a:lumOff val="25000"/>
+                  </a:schemeClr>
+                </a:solidFill>
+                <a:latin typeface="+mn-lt"/>
+                <a:ea typeface="+mn-ea"/>
+                <a:cs typeface="+mn-cs"/>
+              </a:defRPr>
+            </a:lvl1pPr>
+            <a:lvl2pPr marL="384048" indent="-182880" algn="l" defTabSz="914400" rtl="0" eaLnBrk="1" latinLnBrk="0" hangingPunct="1">
+              <a:lnSpc>
+                <a:spcPct val="90000"/>
+              </a:lnSpc>
+              <a:spcBef>
+                <a:spcPts val="200"/>
+              </a:spcBef>
+              <a:spcAft>
+                <a:spcPts val="400"/>
+              </a:spcAft>
+              <a:buClr>
+                <a:schemeClr val="accent1"/>
+              </a:buClr>
+              <a:buFont typeface="Calibri" pitchFamily="34" charset="0"/>
+              <a:buChar char="◦"/>
+              <a:defRPr sz="1800" kern="1200">
+                <a:solidFill>
+                  <a:schemeClr val="tx1">
+                    <a:lumMod val="75000"/>
+                    <a:lumOff val="25000"/>
+                  </a:schemeClr>
+                </a:solidFill>
+                <a:latin typeface="+mn-lt"/>
+                <a:ea typeface="+mn-ea"/>
+                <a:cs typeface="+mn-cs"/>
+              </a:defRPr>
+            </a:lvl2pPr>
+            <a:lvl3pPr marL="566928" indent="-182880" algn="l" defTabSz="914400" rtl="0" eaLnBrk="1" latinLnBrk="0" hangingPunct="1">
+              <a:lnSpc>
+                <a:spcPct val="90000"/>
+              </a:lnSpc>
+              <a:spcBef>
+                <a:spcPts val="200"/>
+              </a:spcBef>
+              <a:spcAft>
+                <a:spcPts val="400"/>
+              </a:spcAft>
+              <a:buClr>
+                <a:schemeClr val="accent1"/>
+              </a:buClr>
+              <a:buFont typeface="Calibri" pitchFamily="34" charset="0"/>
+              <a:buChar char="◦"/>
+              <a:defRPr sz="1400" kern="1200">
+                <a:solidFill>
+                  <a:schemeClr val="tx1">
+                    <a:lumMod val="75000"/>
+                    <a:lumOff val="25000"/>
+                  </a:schemeClr>
+                </a:solidFill>
+                <a:latin typeface="+mn-lt"/>
+                <a:ea typeface="+mn-ea"/>
+                <a:cs typeface="+mn-cs"/>
+              </a:defRPr>
+            </a:lvl3pPr>
+            <a:lvl4pPr marL="749808" indent="-182880" algn="l" defTabSz="914400" rtl="0" eaLnBrk="1" latinLnBrk="0" hangingPunct="1">
+              <a:lnSpc>
+                <a:spcPct val="90000"/>
+              </a:lnSpc>
+              <a:spcBef>
+                <a:spcPts val="200"/>
+              </a:spcBef>
+              <a:spcAft>
+                <a:spcPts val="400"/>
+              </a:spcAft>
+              <a:buClr>
+                <a:schemeClr val="accent1"/>
+              </a:buClr>
+              <a:buFont typeface="Calibri" pitchFamily="34" charset="0"/>
+              <a:buChar char="◦"/>
+              <a:defRPr sz="1400" kern="1200">
+                <a:solidFill>
+                  <a:schemeClr val="tx1">
+                    <a:lumMod val="75000"/>
+                    <a:lumOff val="25000"/>
+                  </a:schemeClr>
+                </a:solidFill>
+                <a:latin typeface="+mn-lt"/>
+                <a:ea typeface="+mn-ea"/>
+                <a:cs typeface="+mn-cs"/>
+              </a:defRPr>
+            </a:lvl4pPr>
+            <a:lvl5pPr marL="932688" indent="-182880" algn="l" defTabSz="914400" rtl="0" eaLnBrk="1" latinLnBrk="0" hangingPunct="1">
+              <a:lnSpc>
+                <a:spcPct val="90000"/>
+              </a:lnSpc>
+              <a:spcBef>
+                <a:spcPts val="200"/>
+              </a:spcBef>
+              <a:spcAft>
+                <a:spcPts val="400"/>
+              </a:spcAft>
+              <a:buClr>
+                <a:schemeClr val="accent1"/>
+              </a:buClr>
+              <a:buFont typeface="Calibri" pitchFamily="34" charset="0"/>
+              <a:buChar char="◦"/>
+              <a:defRPr sz="1400" kern="1200">
+                <a:solidFill>
+                  <a:schemeClr val="tx1">
+                    <a:lumMod val="75000"/>
+                    <a:lumOff val="25000"/>
+                  </a:schemeClr>
+                </a:solidFill>
+                <a:latin typeface="+mn-lt"/>
+                <a:ea typeface="+mn-ea"/>
+                <a:cs typeface="+mn-cs"/>
+              </a:defRPr>
+            </a:lvl5pPr>
+            <a:lvl6pPr marL="1100000" indent="-228600" algn="l" defTabSz="914400" rtl="0" eaLnBrk="1" latinLnBrk="0" hangingPunct="1">
+              <a:lnSpc>
+                <a:spcPct val="90000"/>
+              </a:lnSpc>
+              <a:spcBef>
+                <a:spcPts val="200"/>
+              </a:spcBef>
+              <a:spcAft>
+                <a:spcPts val="400"/>
+              </a:spcAft>
+              <a:buClr>
+                <a:schemeClr val="accent1"/>
+              </a:buClr>
+              <a:buFont typeface="Calibri" pitchFamily="34" charset="0"/>
+              <a:buChar char="◦"/>
+              <a:defRPr sz="1400" kern="1200">
+                <a:solidFill>
+                  <a:schemeClr val="tx1">
+                    <a:lumMod val="75000"/>
+                    <a:lumOff val="25000"/>
+                  </a:schemeClr>
+                </a:solidFill>
+                <a:latin typeface="+mn-lt"/>
+                <a:ea typeface="+mn-ea"/>
+                <a:cs typeface="+mn-cs"/>
+              </a:defRPr>
+            </a:lvl6pPr>
+            <a:lvl7pPr marL="1300000" indent="-228600" algn="l" defTabSz="914400" rtl="0" eaLnBrk="1" latinLnBrk="0" hangingPunct="1">
+              <a:lnSpc>
+                <a:spcPct val="90000"/>
+              </a:lnSpc>
+              <a:spcBef>
+                <a:spcPts val="200"/>
+              </a:spcBef>
+              <a:spcAft>
+                <a:spcPts val="400"/>
+              </a:spcAft>
+              <a:buClr>
+                <a:schemeClr val="accent1"/>
+              </a:buClr>
+              <a:buFont typeface="Calibri" pitchFamily="34" charset="0"/>
+              <a:buChar char="◦"/>
+              <a:defRPr sz="1400" kern="1200">
+                <a:solidFill>
+                  <a:schemeClr val="tx1">
+                    <a:lumMod val="75000"/>
+                    <a:lumOff val="25000"/>
+                  </a:schemeClr>
+                </a:solidFill>
+                <a:latin typeface="+mn-lt"/>
+                <a:ea typeface="+mn-ea"/>
+                <a:cs typeface="+mn-cs"/>
+              </a:defRPr>
+            </a:lvl7pPr>
+            <a:lvl8pPr marL="1500000" indent="-228600" algn="l" defTabSz="914400" rtl="0" eaLnBrk="1" latinLnBrk="0" hangingPunct="1">
+              <a:lnSpc>
+                <a:spcPct val="90000"/>
+              </a:lnSpc>
+              <a:spcBef>
+                <a:spcPts val="200"/>
+              </a:spcBef>
+              <a:spcAft>
+                <a:spcPts val="400"/>
+              </a:spcAft>
+              <a:buClr>
+                <a:schemeClr val="accent1"/>
+              </a:buClr>
+              <a:buFont typeface="Calibri" pitchFamily="34" charset="0"/>
+              <a:buChar char="◦"/>
+              <a:defRPr sz="1400" kern="1200">
+                <a:solidFill>
+                  <a:schemeClr val="tx1">
+                    <a:lumMod val="75000"/>
+                    <a:lumOff val="25000"/>
+                  </a:schemeClr>
+                </a:solidFill>
+                <a:latin typeface="+mn-lt"/>
+                <a:ea typeface="+mn-ea"/>
+                <a:cs typeface="+mn-cs"/>
+              </a:defRPr>
+            </a:lvl8pPr>
+            <a:lvl9pPr marL="1700000" indent="-228600" algn="l" defTabSz="914400" rtl="0" eaLnBrk="1" latinLnBrk="0" hangingPunct="1">
+              <a:lnSpc>
+                <a:spcPct val="90000"/>
+              </a:lnSpc>
+              <a:spcBef>
+                <a:spcPts val="200"/>
+              </a:spcBef>
+              <a:spcAft>
+                <a:spcPts val="400"/>
+              </a:spcAft>
+              <a:buClr>
+                <a:schemeClr val="accent1"/>
+              </a:buClr>
+              <a:buFont typeface="Calibri" pitchFamily="34" charset="0"/>
+              <a:buChar char="◦"/>
+              <a:defRPr sz="1400" kern="1200">
+                <a:solidFill>
+                  <a:schemeClr val="tx1">
+                    <a:lumMod val="75000"/>
+                    <a:lumOff val="25000"/>
+                  </a:schemeClr>
+                </a:solidFill>
+                <a:latin typeface="+mn-lt"/>
+                <a:ea typeface="+mn-ea"/>
+                <a:cs typeface="+mn-cs"/>
+              </a:defRPr>
+            </a:lvl9pPr>
+          </a:lstStyle>
+          <a:p>
+            <a:pPr lvl="1"/>
+            <a:r>
+              <a:rPr lang="en-US" sz="1200" dirty="0"/>
+              <a:t>*rates are in passengers/minute</a:t>
+            </a:r>
+          </a:p>
+        </p:txBody>
+      </p:sp>
     </p:spTree>
     <p:extLst>
       <p:ext uri="{BB962C8B-B14F-4D97-AF65-F5344CB8AC3E}">

--- a/Group Project 2/Analysis of Airport Security With Queuing Theory.pptx
+++ b/Group Project 2/Analysis of Airport Security With Queuing Theory.pptx
@@ -8489,7 +8489,7 @@
           <a:p>
             <a:r>
               <a:rPr lang="en-US" dirty="0"/>
-              <a:t>Parallel M/N/C </a:t>
+              <a:t>Parallel M/N/c </a:t>
             </a:r>
           </a:p>
         </p:txBody>
@@ -8524,7 +8524,7 @@
           <a:p>
             <a:r>
               <a:rPr lang="en-US" sz="1600" dirty="0"/>
-              <a:t>Next, we model the system as parallel queues, representative of an airport security checkpoint.</a:t>
+              <a:t>Next, we model the system as separate lines, representative of an airport security checkpoint.</a:t>
             </a:r>
           </a:p>
           <a:p>
@@ -8550,7 +8550,7 @@
           <a:p>
             <a:r>
               <a:rPr lang="en-US" sz="1600" dirty="0"/>
-              <a:t>These servers are split, with 1 terminal supporting Precheck and 3 supporting standard screening.</a:t>
+              <a:t>These servers are split, with 1 server supporting Precheck and 3 supporting standard screening.</a:t>
             </a:r>
           </a:p>
           <a:p>
@@ -9510,7 +9510,7 @@
             </a:br>
             <a:r>
               <a:rPr lang="en-US" sz="3200" dirty="0"/>
-              <a:t>(1 TSA lane, 3 regular lanes)</a:t>
+              <a:t>(2 TSA lane, 2 regular lanes)</a:t>
             </a:r>
           </a:p>
         </p:txBody>
@@ -10249,7 +10249,7 @@
             </a:pPr>
             <a:r>
               <a:rPr lang="en-US" dirty="0"/>
-              <a:t>Built a priority queue M/M/C Model.</a:t>
+              <a:t>Built a priority queue M/M/c Model.</a:t>
             </a:r>
           </a:p>
           <a:p>
@@ -10279,7 +10279,7 @@
             </a:pPr>
             <a:r>
               <a:rPr lang="en-US" dirty="0"/>
-              <a:t>Modified M/M/C to an M/N/C parallel model to simulate a single checkpoint.</a:t>
+              <a:t>Modified M/M/c to an M/N/c parallel (separate lines) model to simulate a single checkpoint.</a:t>
             </a:r>
           </a:p>
           <a:p>
@@ -13344,7 +13344,7 @@
           <a:p>
             <a:r>
               <a:rPr lang="en-US" dirty="0"/>
-              <a:t>M/M/C Priority Queue Model</a:t>
+              <a:t>M/M/c Priority Queue Model</a:t>
             </a:r>
           </a:p>
         </p:txBody>

--- a/Group Project 2/Analysis of Airport Security With Queuing Theory.pptx
+++ b/Group Project 2/Analysis of Airport Security With Queuing Theory.pptx
@@ -11281,7 +11281,7 @@
             <a:pPr lvl="1"/>
             <a:r>
               <a:rPr lang="en-US" sz="1500" dirty="0"/>
-              <a:t>Accommodates passenger types with parallel queues.</a:t>
+              <a:t>Accommodates different passenger types with parallel queues (e.g., separate lines).</a:t>
             </a:r>
           </a:p>
           <a:p>
@@ -12347,7 +12347,7 @@
                   </a:schemeClr>
                 </a:solidFill>
               </a:rPr>
-              <a:t>Recorded data is representative of a M/M/C que</a:t>
+              <a:t>Recorded data is representative of a M/M/C queue</a:t>
             </a:r>
           </a:p>
           <a:p>
@@ -12521,7 +12521,7 @@
                   </a:schemeClr>
                 </a:solidFill>
               </a:rPr>
-              <a:t>Erlang C: the probability an arriving customer is forced to join the queue</a:t>
+              <a:t>Erlang C: the probability that an arriving customer is forced to join the queue</a:t>
             </a:r>
           </a:p>
           <a:p>

--- a/Group Project 2/Analysis of Airport Security With Queuing Theory.pptx
+++ b/Group Project 2/Analysis of Airport Security With Queuing Theory.pptx
@@ -1179,10 +1179,10 @@
     </dgm:pt>
   </dgm:ptLst>
   <dgm:cxnLst>
+    <dgm:cxn modelId="{DC1AA649-6A0B-4C63-BAAF-0AD8D7396153}" type="presOf" srcId="{71F0AC46-0068-435E-83AA-5798092D61BF}" destId="{9A149E6B-9636-4E2E-BE23-C8B95DB956AA}" srcOrd="0" destOrd="0" presId="urn:microsoft.com/office/officeart/2005/8/layout/chevron2"/>
     <dgm:cxn modelId="{B0D7875D-8F1A-4000-8DCC-3A64676AD7FA}" type="presOf" srcId="{9592DD0A-D121-4320-A6C0-B5B222C7F96E}" destId="{94EA7074-8BE1-47D7-9A83-1880DF48095E}" srcOrd="0" destOrd="0" presId="urn:microsoft.com/office/officeart/2005/8/layout/chevron2"/>
     <dgm:cxn modelId="{8DF43D63-9A26-4385-BBD7-6631C87005D5}" srcId="{71F0AC46-0068-435E-83AA-5798092D61BF}" destId="{9592DD0A-D121-4320-A6C0-B5B222C7F96E}" srcOrd="1" destOrd="0" parTransId="{EDBBA798-C3B0-44F8-AEEA-ADBF82396247}" sibTransId="{6B417541-5CDC-40B6-B5DB-9D7BA14FA674}"/>
     <dgm:cxn modelId="{AC7C4966-2005-4725-9A65-9A614164B003}" type="presOf" srcId="{B13937DB-0245-4D61-820E-3AD7F84BE570}" destId="{FDD7560C-9282-4BDE-95A3-1EA1738E7698}" srcOrd="0" destOrd="0" presId="urn:microsoft.com/office/officeart/2005/8/layout/chevron2"/>
-    <dgm:cxn modelId="{DC1AA649-6A0B-4C63-BAAF-0AD8D7396153}" type="presOf" srcId="{71F0AC46-0068-435E-83AA-5798092D61BF}" destId="{9A149E6B-9636-4E2E-BE23-C8B95DB956AA}" srcOrd="0" destOrd="0" presId="urn:microsoft.com/office/officeart/2005/8/layout/chevron2"/>
     <dgm:cxn modelId="{696A956F-226B-4C2F-A76E-7ED1C1F2D01D}" type="presOf" srcId="{374BF912-AE7C-46CB-AB44-E42827C0529F}" destId="{085E04A4-0AEE-4613-9D78-DD4A3FD57523}" srcOrd="0" destOrd="0" presId="urn:microsoft.com/office/officeart/2005/8/layout/chevron2"/>
     <dgm:cxn modelId="{0EF2A670-0CE5-4802-A3FE-30F86E0122E4}" srcId="{71F0AC46-0068-435E-83AA-5798092D61BF}" destId="{374BF912-AE7C-46CB-AB44-E42827C0529F}" srcOrd="0" destOrd="0" parTransId="{1E176BE9-73E3-422B-94F4-0F5F119B27A4}" sibTransId="{28DCFFC2-2197-4E41-8AB7-590049EA0423}"/>
     <dgm:cxn modelId="{0EE64D8A-EF6D-49D6-BB78-156CA9DC9C96}" type="presOf" srcId="{748037CE-811D-4DCF-8AC9-8D9AA207B5F8}" destId="{8EE6655A-D271-4EB3-B2DC-0626CD57261D}" srcOrd="0" destOrd="0" presId="urn:microsoft.com/office/officeart/2005/8/layout/chevron2"/>
@@ -3058,7 +3058,7 @@
           <a:p>
             <a:fld id="{1177A1E1-1B6D-4C20-AD2F-CB2EA266D983}" type="datetimeFigureOut">
               <a:rPr lang="en-US" smtClean="0"/>
-              <a:t>7/28/2025</a:t>
+              <a:t>7/29/25</a:t>
             </a:fld>
             <a:endParaRPr lang="en-US"/>
           </a:p>
@@ -4715,7 +4715,7 @@
           <a:p>
             <a:fld id="{4843D276-EBCF-45FD-A65E-C5B84C7DA712}" type="datetimeFigureOut">
               <a:rPr lang="en-US" smtClean="0"/>
-              <a:t>7/28/2025</a:t>
+              <a:t>7/29/25</a:t>
             </a:fld>
             <a:endParaRPr lang="en-US"/>
           </a:p>
@@ -4923,7 +4923,7 @@
           <a:p>
             <a:fld id="{4843D276-EBCF-45FD-A65E-C5B84C7DA712}" type="datetimeFigureOut">
               <a:rPr lang="en-US" smtClean="0"/>
-              <a:t>7/28/2025</a:t>
+              <a:t>7/29/25</a:t>
             </a:fld>
             <a:endParaRPr lang="en-US"/>
           </a:p>
@@ -5179,7 +5179,7 @@
           <a:p>
             <a:fld id="{4843D276-EBCF-45FD-A65E-C5B84C7DA712}" type="datetimeFigureOut">
               <a:rPr lang="en-US" smtClean="0"/>
-              <a:t>7/28/2025</a:t>
+              <a:t>7/29/25</a:t>
             </a:fld>
             <a:endParaRPr lang="en-US"/>
           </a:p>
@@ -5353,7 +5353,7 @@
           <a:p>
             <a:fld id="{4843D276-EBCF-45FD-A65E-C5B84C7DA712}" type="datetimeFigureOut">
               <a:rPr lang="en-US" smtClean="0"/>
-              <a:t>7/28/2025</a:t>
+              <a:t>7/29/25</a:t>
             </a:fld>
             <a:endParaRPr lang="en-US"/>
           </a:p>
@@ -5696,7 +5696,7 @@
           <a:p>
             <a:fld id="{4843D276-EBCF-45FD-A65E-C5B84C7DA712}" type="datetimeFigureOut">
               <a:rPr lang="en-US" smtClean="0"/>
-              <a:t>7/28/2025</a:t>
+              <a:t>7/29/25</a:t>
             </a:fld>
             <a:endParaRPr lang="en-US"/>
           </a:p>
@@ -5971,7 +5971,7 @@
           <a:p>
             <a:fld id="{4843D276-EBCF-45FD-A65E-C5B84C7DA712}" type="datetimeFigureOut">
               <a:rPr lang="en-US" smtClean="0"/>
-              <a:t>7/28/2025</a:t>
+              <a:t>7/29/25</a:t>
             </a:fld>
             <a:endParaRPr lang="en-US"/>
           </a:p>
@@ -6350,7 +6350,7 @@
           <a:p>
             <a:fld id="{4843D276-EBCF-45FD-A65E-C5B84C7DA712}" type="datetimeFigureOut">
               <a:rPr lang="en-US" smtClean="0"/>
-              <a:t>7/28/2025</a:t>
+              <a:t>7/29/25</a:t>
             </a:fld>
             <a:endParaRPr lang="en-US"/>
           </a:p>
@@ -6468,7 +6468,7 @@
           <a:p>
             <a:fld id="{4843D276-EBCF-45FD-A65E-C5B84C7DA712}" type="datetimeFigureOut">
               <a:rPr lang="en-US" smtClean="0"/>
-              <a:t>7/28/2025</a:t>
+              <a:t>7/29/25</a:t>
             </a:fld>
             <a:endParaRPr lang="en-US"/>
           </a:p>
@@ -6639,7 +6639,7 @@
           <a:p>
             <a:fld id="{4843D276-EBCF-45FD-A65E-C5B84C7DA712}" type="datetimeFigureOut">
               <a:rPr lang="en-US" smtClean="0"/>
-              <a:t>7/28/2025</a:t>
+              <a:t>7/29/25</a:t>
             </a:fld>
             <a:endParaRPr lang="en-US"/>
           </a:p>
@@ -6993,7 +6993,7 @@
           <a:p>
             <a:fld id="{4843D276-EBCF-45FD-A65E-C5B84C7DA712}" type="datetimeFigureOut">
               <a:rPr lang="en-US" smtClean="0"/>
-              <a:t>7/28/2025</a:t>
+              <a:t>7/29/25</a:t>
             </a:fld>
             <a:endParaRPr lang="en-US"/>
           </a:p>
@@ -7375,7 +7375,7 @@
           <a:p>
             <a:fld id="{4843D276-EBCF-45FD-A65E-C5B84C7DA712}" type="datetimeFigureOut">
               <a:rPr lang="en-US" smtClean="0"/>
-              <a:t>7/28/2025</a:t>
+              <a:t>7/29/25</a:t>
             </a:fld>
             <a:endParaRPr lang="en-US"/>
           </a:p>
@@ -7662,7 +7662,7 @@
           <a:p>
             <a:fld id="{4843D276-EBCF-45FD-A65E-C5B84C7DA712}" type="datetimeFigureOut">
               <a:rPr lang="en-US" smtClean="0"/>
-              <a:t>7/28/2025</a:t>
+              <a:t>7/29/25</a:t>
             </a:fld>
             <a:endParaRPr lang="en-US"/>
           </a:p>
@@ -10136,7 +10136,7 @@
       </p:sp>
       <p:pic>
         <p:nvPicPr>
-          <p:cNvPr id="5" name="Content Placeholder 4" descr="A graph of a service rate&#10;&#10;AI-generated content may be incorrect.">
+          <p:cNvPr id="5" name="Content Placeholder 4">
             <a:extLst>
               <a:ext uri="{FF2B5EF4-FFF2-40B4-BE49-F238E27FC236}">
                 <a16:creationId xmlns:a16="http://schemas.microsoft.com/office/drawing/2014/main" id="{DA67C57E-F88E-3BB8-1F90-2624A7C2C51B}"/>
@@ -10158,9 +10158,8 @@
               </a:ext>
             </a:extLst>
           </a:blip>
-          <a:stretch>
-            <a:fillRect/>
-          </a:stretch>
+          <a:srcRect/>
+          <a:stretch/>
         </p:blipFill>
         <p:spPr>
           <a:xfrm>
@@ -10171,7 +10170,7 @@
       </p:pic>
       <p:pic>
         <p:nvPicPr>
-          <p:cNvPr id="7" name="Picture 6" descr="A graph with orange lines and blue lines&#10;&#10;AI-generated content may be incorrect.">
+          <p:cNvPr id="7" name="Picture 6">
             <a:extLst>
               <a:ext uri="{FF2B5EF4-FFF2-40B4-BE49-F238E27FC236}">
                 <a16:creationId xmlns:a16="http://schemas.microsoft.com/office/drawing/2014/main" id="{ED367B30-4BBE-E754-D9C7-65FEB9F94CA8}"/>
@@ -10191,14 +10190,13 @@
               </a:ext>
             </a:extLst>
           </a:blip>
-          <a:stretch>
-            <a:fillRect/>
-          </a:stretch>
+          <a:srcRect/>
+          <a:stretch/>
         </p:blipFill>
         <p:spPr>
           <a:xfrm>
-            <a:off x="6353907" y="2128570"/>
-            <a:ext cx="5161211" cy="3063158"/>
+            <a:off x="6381881" y="2128570"/>
+            <a:ext cx="5105263" cy="3063158"/>
           </a:xfrm>
           <a:prstGeom prst="rect">
             <a:avLst/>
@@ -13280,7 +13278,7 @@
       </p:sp>
       <p:pic>
         <p:nvPicPr>
-          <p:cNvPr id="9" name="Picture 8" descr="A graph of a graph of a cost contour plot&#10;&#10;AI-generated content may be incorrect.">
+          <p:cNvPr id="9" name="Picture 8">
             <a:extLst>
               <a:ext uri="{FF2B5EF4-FFF2-40B4-BE49-F238E27FC236}">
                 <a16:creationId xmlns:a16="http://schemas.microsoft.com/office/drawing/2014/main" id="{538DDF16-E748-BFEC-E594-CDCB3CE26EAF}"/>
@@ -13300,14 +13298,13 @@
               </a:ext>
             </a:extLst>
           </a:blip>
-          <a:stretch>
-            <a:fillRect/>
-          </a:stretch>
+          <a:srcRect/>
+          <a:stretch/>
         </p:blipFill>
         <p:spPr>
           <a:xfrm>
-            <a:off x="3023093" y="1924491"/>
-            <a:ext cx="6206773" cy="4085755"/>
+            <a:off x="2685966" y="1927860"/>
+            <a:ext cx="6820068" cy="4092040"/>
           </a:xfrm>
           <a:prstGeom prst="rect">
             <a:avLst/>

--- a/Group Project 2/Analysis of Airport Security With Queuing Theory.pptx
+++ b/Group Project 2/Analysis of Airport Security With Queuing Theory.pptx
@@ -13303,8 +13303,8 @@
         </p:blipFill>
         <p:spPr>
           <a:xfrm>
-            <a:off x="2685966" y="1927860"/>
-            <a:ext cx="6820068" cy="4092040"/>
+            <a:off x="2959117" y="1927860"/>
+            <a:ext cx="6273765" cy="4092040"/>
           </a:xfrm>
           <a:prstGeom prst="rect">
             <a:avLst/>
